--- a/docs/preprocessing/presentation/VN_IT_Job_Preprocessing.pptx
+++ b/docs/preprocessing/presentation/VN_IT_Job_Preprocessing.pptx
@@ -518,7 +518,7 @@
             <a:r>
               <a:rPr lang="en-US" dirty="0"/>
               <a:t>note:
-Chào thầy cô và các bạn. Hôm nay nhóm em xin trình bày về Kiến trúc Tiền xử lý Dữ liệu Đa nguồn cho đề tài Phân tích thị trường việc làm IT tại Việt Nam. Trọng tâm của bài báo cáo là phương pháp luận khoa học và giải pháp kỹ thuật để chuyển đổi hơn 10.000 bài đăng thô từ 8 sàn tuyển dụng lớn thành Bộ Dữ Liệu Vàng 8.967 bản ghi đạt chuẩn 100% PURE JSON RFC 8259.</a:t>
+Chào thầy cô và các bạn. Hôm nay nhóm em xin trình bày về Kiến trúc Tiền xử lý Dữ liệu Đa nguồn cho đề tài Phân tích thị trường việc làm IT tại Việt Nam. Trọng tâm của bài báo cáo là phương pháp luận khoa học và giải pháp kỹ thuật để chuyển đổi 10.456 bài đăng thô từ 8 sàn công nghệ lớn thành Bộ Dữ Liệu Vàng 8.959 bản ghi đạt chuẩn 100% PURE JSON RFC 8259.</a:t>
             </a:r>
             <a:endParaRPr lang="en-US" dirty="0"/>
           </a:p>
@@ -607,7 +607,7 @@
             <a:r>
               <a:rPr lang="en-US" dirty="0"/>
               <a:t>note:
-Giai đoạn 3.5 là bước đột phá AI của hệ thống. Thay vì gọi nhiều prompt riêng lẻ tốn kém, nhóm xây dựng Gemini All-in-One Agent giải quyết 4 nhiệm vụ cùng lúc: phân loại kỹ năng 3 lớp Hard-Soft-Domain, trích xuất yêu cầu học vấn và làm thứ 7, dự đoán lương thị trường có cơ sở, và dịch thuật các JD tiếng Anh về tiếng Việt. Đi kèm là module CheckpointStore giúp tiến trình có thể tạm dừng và chạy tiếp bất cứ lúc nào.</a:t>
+Ở Bước 4, hệ thống giải quyết triệt để bài toán trùng lặp xuyên sàn. Để không phải tính toán 50 triệu cặp, chúng em dùng Blocking gom cụm công ty và địa phương, sau đó đo Cosine Similarity ngưỡng 0.82. Kết quả là gộp thành công 1.136 bài trùng trong 768 cụm và loại bỏ 361 tin rác stub JD.</a:t>
             </a:r>
             <a:endParaRPr lang="en-US" dirty="0"/>
           </a:p>
@@ -696,7 +696,7 @@
             <a:r>
               <a:rPr lang="en-US" dirty="0"/>
               <a:t>note:
-Để khống chế tuyệt đối hiện tượng ảo giác của mô hình ngôn ngữ lớn, nhóm phát minh cơ chế Market Anchor Calculator. Mọi dự đoán lương của Gemini đều phải lấy mỏ neo từ ma trận trung vị thực tế của sàn và cấp bậc. Nếu bài đăng là Junior trên TopCV, Gemini sẽ phải neo xung quanh mức 12 đến 20 triệu chứ không thể tùy tiện đoán 50 triệu hay 5 triệu.</a:t>
+Giai đoạn 4.5 là bước đột phá AI với cơ chế 2-Tier Decision Gate. Để không lãng phí token cho 10.000 bài, Tier 1 Heuristic quét từ khóa trước. Chỉ khi bài viết bằng tiếng Anh cần dịch thuật hoặc không bóc được kỹ năng thì Gemini mới được kích hoạt. Đi kèm là CheckpointStore giúp tiến trình bền bỉ chạy tiếp bất cứ lúc nào.</a:t>
             </a:r>
             <a:endParaRPr lang="en-US" dirty="0"/>
           </a:p>
@@ -785,7 +785,7 @@
             <a:r>
               <a:rPr lang="en-US" dirty="0"/>
               <a:t>note:
-Một đóng góp quan trọng ở Bước 4 là thuật toán khử trùng lặp xuyên sàn. Để không phải so sánh chéo 10.000 x 10.000 cặp bản ghi, chúng em dùng kỹ thuật Blocking theo tên công ty và tỉnh thành. Sau đó áp dụng Cosine Similarity trên vector ngữ nghĩa với ngưỡng thực nghiệm 0.82. Kết quả là hệ thống đã gộp thành công 1.057 bài đăng trùng chéo giữa các sàn.</a:t>
+Chúng em đề cao nguyên tắc Ground-Truth Realism: nếu một bài đăng thực sự là lương thỏa thuận, hệ thống sẽ bảo toàn null kèm cờ is_salary_negotiable = True, chứ không bịa đặt số lương giả mạo. Đồng thời, Market Anchor Calculator 4 cấp đảm bảo mọi dự đoán đều nằm vững chắc trong biên độ trung vị thực tế của thị trường.</a:t>
             </a:r>
             <a:endParaRPr lang="en-US" dirty="0"/>
           </a:p>
@@ -874,7 +874,7 @@
             <a:r>
               <a:rPr lang="en-US" dirty="0"/>
               <a:t>note:
-Sau khi qua TargetSchemaFormatter, bộ dữ liệu đã được lột xác hoàn toàn: không còn bất kỳ cột thô mang tiền tố raw_, không còn các cờ kỹ thuật phục vụ debug. Toàn bộ 8.967 bản ghi đều chuẩn xác 11 khóa ở root level, cấu trúc lồng nhau được tinh giản gọn gàng, sẵn sàng nạp ngay vào DuckDB, Pandas hoặc các mô hình Machine Learning.</a:t>
+Sau khi qua TargetSchemaFormatter, bộ dữ liệu đã được lột xác hoàn toàn: không còn bất kỳ cột thô mang tiền tố raw_, không còn các cờ kỹ thuật phục vụ debug. Toàn bộ 8.959 bản ghi đều chuẩn xác 11 khóa ở root level, cấu trúc lồng nhau được tinh giản gọn gàng, sẵn sàng nạp ngay vào DuckDB, Pandas hoặc các mô hình Machine Learning.</a:t>
             </a:r>
             <a:endParaRPr lang="en-US" dirty="0"/>
           </a:p>
@@ -963,7 +963,7 @@
             <a:r>
               <a:rPr lang="en-US" dirty="0"/>
               <a:t>note:
-Tính khoa học của đề tài được khẳng định qua Suite kiểm định QA tự động 5/5 PASSED. Chúng em kiểm tra khắt khe chuẩn RFC 8259: không cho phép bất kỳ hằng số NaN nào tồn tại trong JSON. Dòng dõi dữ liệu từ 10.024 bản ghi thô kế thừa chuẩn xác sang 8.967 bản ghi Golden Master, đảm bảo tính toàn vẹn 100%.</a:t>
+Tính khoa học của đề tài được khẳng định qua Suite kiểm định QA tự động 5/5 PASSED. Chúng em kiểm tra khắt khe chuẩn RFC 8259: không cho phép bất kỳ hằng số NaN nào tồn tại trong JSON. Dòng dõi dữ liệu từ 10.456 bản ghi thô kế thừa chuẩn xác sang 8.959 bản ghi Golden Master, đảm bảo tính toàn vẹn 100%.</a:t>
             </a:r>
             <a:endParaRPr lang="en-US" dirty="0"/>
           </a:p>
@@ -1052,7 +1052,7 @@
             <a:r>
               <a:rPr lang="en-US" dirty="0"/>
               <a:t>note:
-Bảng đối chiếu trước và sau tiền xử lý là minh chứng rõ ràng nhất cho hiệu quả của hệ thống: Tỷ lệ phủ dữ liệu lương và kinh nghiệm đạt mức 100% tuyệt đối, độ lệch Skewness của mức lương từ 5.8 được kéo về mức 0.42 đạt chuẩn phân phối chuẩn, và toàn bộ kỹ năng công nghệ được phân loại rạch ròi 3 lớp.</a:t>
+Bảng đối chiếu trước và sau tiền xử lý chứng minh hiệu quả toàn diện: từ 10.456 bài thô ban đầu, hệ thống đã tinh gọn về 8.959 bài độc bản, độ lệch phân phối lương Skewness từ 4.01 được đưa về -0.66 gần đối xứng chuẩn, độ phủ kinh nghiệm đạt 100% và 8.621 bài có học vấn chuẩn hóa.</a:t>
             </a:r>
             <a:endParaRPr lang="en-US" dirty="0"/>
           </a:p>
@@ -1319,7 +1319,7 @@
             <a:r>
               <a:rPr lang="en-US" dirty="0"/>
               <a:t>note:
-Để tránh tình trạng chồng chéo chức năng giữa các module, chúng em thiết lập Ma trận Ranh giới đanh thép. Giai đoạn 1 chỉ thuần túy tích hợp cấu trúc, giai đoạn 2 chuyển đổi định dạng và bóc tách định lượng, giai đoạn 3 xử lý khuyết thiếu thống kê và ngoại lai, và giai đoạn 4 chuẩn hóa sâu để đóng gói Bộ Dữ Liệu Vàng.</a:t>
+Hệ thống tiền xử lý được thiết kế theo 5 giai đoạn liên hoàn: Giai đoạn 1 tích hợp cấu trúc, Giai đoạn 2 chuyển hóa định dạng &amp; Cascade regex, Giai đoạn 3 xử lý khuyết thiếu và ngoại lai thống kê, Giai đoạn 4 chuẩn hóa sâu &amp; khử trùng lặp thực thể, và Giai đoạn 4.5 ứng dụng Gemini All-in-One với cơ chế 2-Tier Decision Gate thông minh, bảo toàn Ground-Truth Realism.</a:t>
             </a:r>
             <a:endParaRPr lang="en-US" dirty="0"/>
           </a:p>
